--- a/這一生最美的祝福(崇拜版).pptx
+++ b/這一生最美的祝福(崇拜版).pptx
@@ -294,7 +294,8 @@
           <a:p>
             <a:fld id="{33F91C55-731A-40CD-85E6-99DFAEA3FE8C}" type="datetimeFigureOut">
               <a:rPr lang="vi-VN" smtClean="0"/>
-              <a:t>09/04/2022</a:t>
+              <a:pPr/>
+              <a:t>30/07/2024</a:t>
             </a:fld>
             <a:endParaRPr lang="vi-VN"/>
           </a:p>
@@ -336,6 +337,7 @@
           <a:p>
             <a:fld id="{8B6AAF8F-DA5E-43F5-BA0E-0C99CF35ACC9}" type="slidenum">
               <a:rPr lang="vi-VN" smtClean="0"/>
+              <a:pPr/>
               <a:t>‹#›</a:t>
             </a:fld>
             <a:endParaRPr lang="vi-VN"/>
@@ -345,7 +347,7 @@
     </p:spTree>
     <p:extLst>
       <p:ext uri="{BB962C8B-B14F-4D97-AF65-F5344CB8AC3E}">
-        <p14:creationId xmlns:p14="http://schemas.microsoft.com/office/powerpoint/2010/main" val="2208279246"/>
+        <p14:creationId xmlns:p14="http://schemas.microsoft.com/office/powerpoint/2010/main" xmlns="" val="2208279246"/>
       </p:ext>
     </p:extLst>
   </p:cSld>
@@ -464,7 +466,8 @@
           <a:p>
             <a:fld id="{33F91C55-731A-40CD-85E6-99DFAEA3FE8C}" type="datetimeFigureOut">
               <a:rPr lang="vi-VN" smtClean="0"/>
-              <a:t>09/04/2022</a:t>
+              <a:pPr/>
+              <a:t>30/07/2024</a:t>
             </a:fld>
             <a:endParaRPr lang="vi-VN"/>
           </a:p>
@@ -506,6 +509,7 @@
           <a:p>
             <a:fld id="{8B6AAF8F-DA5E-43F5-BA0E-0C99CF35ACC9}" type="slidenum">
               <a:rPr lang="vi-VN" smtClean="0"/>
+              <a:pPr/>
               <a:t>‹#›</a:t>
             </a:fld>
             <a:endParaRPr lang="vi-VN"/>
@@ -515,7 +519,7 @@
     </p:spTree>
     <p:extLst>
       <p:ext uri="{BB962C8B-B14F-4D97-AF65-F5344CB8AC3E}">
-        <p14:creationId xmlns:p14="http://schemas.microsoft.com/office/powerpoint/2010/main" val="4132775806"/>
+        <p14:creationId xmlns:p14="http://schemas.microsoft.com/office/powerpoint/2010/main" xmlns="" val="4132775806"/>
       </p:ext>
     </p:extLst>
   </p:cSld>
@@ -644,7 +648,8 @@
           <a:p>
             <a:fld id="{33F91C55-731A-40CD-85E6-99DFAEA3FE8C}" type="datetimeFigureOut">
               <a:rPr lang="vi-VN" smtClean="0"/>
-              <a:t>09/04/2022</a:t>
+              <a:pPr/>
+              <a:t>30/07/2024</a:t>
             </a:fld>
             <a:endParaRPr lang="vi-VN"/>
           </a:p>
@@ -686,6 +691,7 @@
           <a:p>
             <a:fld id="{8B6AAF8F-DA5E-43F5-BA0E-0C99CF35ACC9}" type="slidenum">
               <a:rPr lang="vi-VN" smtClean="0"/>
+              <a:pPr/>
               <a:t>‹#›</a:t>
             </a:fld>
             <a:endParaRPr lang="vi-VN"/>
@@ -695,7 +701,7 @@
     </p:spTree>
     <p:extLst>
       <p:ext uri="{BB962C8B-B14F-4D97-AF65-F5344CB8AC3E}">
-        <p14:creationId xmlns:p14="http://schemas.microsoft.com/office/powerpoint/2010/main" val="4041564636"/>
+        <p14:creationId xmlns:p14="http://schemas.microsoft.com/office/powerpoint/2010/main" xmlns="" val="4041564636"/>
       </p:ext>
     </p:extLst>
   </p:cSld>
@@ -814,7 +820,8 @@
           <a:p>
             <a:fld id="{33F91C55-731A-40CD-85E6-99DFAEA3FE8C}" type="datetimeFigureOut">
               <a:rPr lang="vi-VN" smtClean="0"/>
-              <a:t>09/04/2022</a:t>
+              <a:pPr/>
+              <a:t>30/07/2024</a:t>
             </a:fld>
             <a:endParaRPr lang="vi-VN"/>
           </a:p>
@@ -856,6 +863,7 @@
           <a:p>
             <a:fld id="{8B6AAF8F-DA5E-43F5-BA0E-0C99CF35ACC9}" type="slidenum">
               <a:rPr lang="vi-VN" smtClean="0"/>
+              <a:pPr/>
               <a:t>‹#›</a:t>
             </a:fld>
             <a:endParaRPr lang="vi-VN"/>
@@ -865,7 +873,7 @@
     </p:spTree>
     <p:extLst>
       <p:ext uri="{BB962C8B-B14F-4D97-AF65-F5344CB8AC3E}">
-        <p14:creationId xmlns:p14="http://schemas.microsoft.com/office/powerpoint/2010/main" val="1554570196"/>
+        <p14:creationId xmlns:p14="http://schemas.microsoft.com/office/powerpoint/2010/main" xmlns="" val="1554570196"/>
       </p:ext>
     </p:extLst>
   </p:cSld>
@@ -1060,7 +1068,8 @@
           <a:p>
             <a:fld id="{33F91C55-731A-40CD-85E6-99DFAEA3FE8C}" type="datetimeFigureOut">
               <a:rPr lang="vi-VN" smtClean="0"/>
-              <a:t>09/04/2022</a:t>
+              <a:pPr/>
+              <a:t>30/07/2024</a:t>
             </a:fld>
             <a:endParaRPr lang="vi-VN"/>
           </a:p>
@@ -1102,6 +1111,7 @@
           <a:p>
             <a:fld id="{8B6AAF8F-DA5E-43F5-BA0E-0C99CF35ACC9}" type="slidenum">
               <a:rPr lang="vi-VN" smtClean="0"/>
+              <a:pPr/>
               <a:t>‹#›</a:t>
             </a:fld>
             <a:endParaRPr lang="vi-VN"/>
@@ -1111,7 +1121,7 @@
     </p:spTree>
     <p:extLst>
       <p:ext uri="{BB962C8B-B14F-4D97-AF65-F5344CB8AC3E}">
-        <p14:creationId xmlns:p14="http://schemas.microsoft.com/office/powerpoint/2010/main" val="2958591373"/>
+        <p14:creationId xmlns:p14="http://schemas.microsoft.com/office/powerpoint/2010/main" xmlns="" val="2958591373"/>
       </p:ext>
     </p:extLst>
   </p:cSld>
@@ -1348,7 +1358,8 @@
           <a:p>
             <a:fld id="{33F91C55-731A-40CD-85E6-99DFAEA3FE8C}" type="datetimeFigureOut">
               <a:rPr lang="vi-VN" smtClean="0"/>
-              <a:t>09/04/2022</a:t>
+              <a:pPr/>
+              <a:t>30/07/2024</a:t>
             </a:fld>
             <a:endParaRPr lang="vi-VN"/>
           </a:p>
@@ -1390,6 +1401,7 @@
           <a:p>
             <a:fld id="{8B6AAF8F-DA5E-43F5-BA0E-0C99CF35ACC9}" type="slidenum">
               <a:rPr lang="vi-VN" smtClean="0"/>
+              <a:pPr/>
               <a:t>‹#›</a:t>
             </a:fld>
             <a:endParaRPr lang="vi-VN"/>
@@ -1399,7 +1411,7 @@
     </p:spTree>
     <p:extLst>
       <p:ext uri="{BB962C8B-B14F-4D97-AF65-F5344CB8AC3E}">
-        <p14:creationId xmlns:p14="http://schemas.microsoft.com/office/powerpoint/2010/main" val="2547088311"/>
+        <p14:creationId xmlns:p14="http://schemas.microsoft.com/office/powerpoint/2010/main" xmlns="" val="2547088311"/>
       </p:ext>
     </p:extLst>
   </p:cSld>
@@ -1770,7 +1782,8 @@
           <a:p>
             <a:fld id="{33F91C55-731A-40CD-85E6-99DFAEA3FE8C}" type="datetimeFigureOut">
               <a:rPr lang="vi-VN" smtClean="0"/>
-              <a:t>09/04/2022</a:t>
+              <a:pPr/>
+              <a:t>30/07/2024</a:t>
             </a:fld>
             <a:endParaRPr lang="vi-VN"/>
           </a:p>
@@ -1812,6 +1825,7 @@
           <a:p>
             <a:fld id="{8B6AAF8F-DA5E-43F5-BA0E-0C99CF35ACC9}" type="slidenum">
               <a:rPr lang="vi-VN" smtClean="0"/>
+              <a:pPr/>
               <a:t>‹#›</a:t>
             </a:fld>
             <a:endParaRPr lang="vi-VN"/>
@@ -1821,7 +1835,7 @@
     </p:spTree>
     <p:extLst>
       <p:ext uri="{BB962C8B-B14F-4D97-AF65-F5344CB8AC3E}">
-        <p14:creationId xmlns:p14="http://schemas.microsoft.com/office/powerpoint/2010/main" val="903292995"/>
+        <p14:creationId xmlns:p14="http://schemas.microsoft.com/office/powerpoint/2010/main" xmlns="" val="903292995"/>
       </p:ext>
     </p:extLst>
   </p:cSld>
@@ -1888,7 +1902,8 @@
           <a:p>
             <a:fld id="{33F91C55-731A-40CD-85E6-99DFAEA3FE8C}" type="datetimeFigureOut">
               <a:rPr lang="vi-VN" smtClean="0"/>
-              <a:t>09/04/2022</a:t>
+              <a:pPr/>
+              <a:t>30/07/2024</a:t>
             </a:fld>
             <a:endParaRPr lang="vi-VN"/>
           </a:p>
@@ -1930,6 +1945,7 @@
           <a:p>
             <a:fld id="{8B6AAF8F-DA5E-43F5-BA0E-0C99CF35ACC9}" type="slidenum">
               <a:rPr lang="vi-VN" smtClean="0"/>
+              <a:pPr/>
               <a:t>‹#›</a:t>
             </a:fld>
             <a:endParaRPr lang="vi-VN"/>
@@ -1939,7 +1955,7 @@
     </p:spTree>
     <p:extLst>
       <p:ext uri="{BB962C8B-B14F-4D97-AF65-F5344CB8AC3E}">
-        <p14:creationId xmlns:p14="http://schemas.microsoft.com/office/powerpoint/2010/main" val="2761753993"/>
+        <p14:creationId xmlns:p14="http://schemas.microsoft.com/office/powerpoint/2010/main" xmlns="" val="2761753993"/>
       </p:ext>
     </p:extLst>
   </p:cSld>
@@ -1983,7 +1999,8 @@
           <a:p>
             <a:fld id="{33F91C55-731A-40CD-85E6-99DFAEA3FE8C}" type="datetimeFigureOut">
               <a:rPr lang="vi-VN" smtClean="0"/>
-              <a:t>09/04/2022</a:t>
+              <a:pPr/>
+              <a:t>30/07/2024</a:t>
             </a:fld>
             <a:endParaRPr lang="vi-VN"/>
           </a:p>
@@ -2025,6 +2042,7 @@
           <a:p>
             <a:fld id="{8B6AAF8F-DA5E-43F5-BA0E-0C99CF35ACC9}" type="slidenum">
               <a:rPr lang="vi-VN" smtClean="0"/>
+              <a:pPr/>
               <a:t>‹#›</a:t>
             </a:fld>
             <a:endParaRPr lang="vi-VN"/>
@@ -2034,7 +2052,7 @@
     </p:spTree>
     <p:extLst>
       <p:ext uri="{BB962C8B-B14F-4D97-AF65-F5344CB8AC3E}">
-        <p14:creationId xmlns:p14="http://schemas.microsoft.com/office/powerpoint/2010/main" val="2952340022"/>
+        <p14:creationId xmlns:p14="http://schemas.microsoft.com/office/powerpoint/2010/main" xmlns="" val="2952340022"/>
       </p:ext>
     </p:extLst>
   </p:cSld>
@@ -2260,7 +2278,8 @@
           <a:p>
             <a:fld id="{33F91C55-731A-40CD-85E6-99DFAEA3FE8C}" type="datetimeFigureOut">
               <a:rPr lang="vi-VN" smtClean="0"/>
-              <a:t>09/04/2022</a:t>
+              <a:pPr/>
+              <a:t>30/07/2024</a:t>
             </a:fld>
             <a:endParaRPr lang="vi-VN"/>
           </a:p>
@@ -2302,6 +2321,7 @@
           <a:p>
             <a:fld id="{8B6AAF8F-DA5E-43F5-BA0E-0C99CF35ACC9}" type="slidenum">
               <a:rPr lang="vi-VN" smtClean="0"/>
+              <a:pPr/>
               <a:t>‹#›</a:t>
             </a:fld>
             <a:endParaRPr lang="vi-VN"/>
@@ -2311,7 +2331,7 @@
     </p:spTree>
     <p:extLst>
       <p:ext uri="{BB962C8B-B14F-4D97-AF65-F5344CB8AC3E}">
-        <p14:creationId xmlns:p14="http://schemas.microsoft.com/office/powerpoint/2010/main" val="3819004546"/>
+        <p14:creationId xmlns:p14="http://schemas.microsoft.com/office/powerpoint/2010/main" xmlns="" val="3819004546"/>
       </p:ext>
     </p:extLst>
   </p:cSld>
@@ -2517,7 +2537,8 @@
           <a:p>
             <a:fld id="{33F91C55-731A-40CD-85E6-99DFAEA3FE8C}" type="datetimeFigureOut">
               <a:rPr lang="vi-VN" smtClean="0"/>
-              <a:t>09/04/2022</a:t>
+              <a:pPr/>
+              <a:t>30/07/2024</a:t>
             </a:fld>
             <a:endParaRPr lang="vi-VN"/>
           </a:p>
@@ -2559,6 +2580,7 @@
           <a:p>
             <a:fld id="{8B6AAF8F-DA5E-43F5-BA0E-0C99CF35ACC9}" type="slidenum">
               <a:rPr lang="vi-VN" smtClean="0"/>
+              <a:pPr/>
               <a:t>‹#›</a:t>
             </a:fld>
             <a:endParaRPr lang="vi-VN"/>
@@ -2568,7 +2590,7 @@
     </p:spTree>
     <p:extLst>
       <p:ext uri="{BB962C8B-B14F-4D97-AF65-F5344CB8AC3E}">
-        <p14:creationId xmlns:p14="http://schemas.microsoft.com/office/powerpoint/2010/main" val="1469333576"/>
+        <p14:creationId xmlns:p14="http://schemas.microsoft.com/office/powerpoint/2010/main" xmlns="" val="1469333576"/>
       </p:ext>
     </p:extLst>
   </p:cSld>
@@ -2735,7 +2757,8 @@
           <a:p>
             <a:fld id="{33F91C55-731A-40CD-85E6-99DFAEA3FE8C}" type="datetimeFigureOut">
               <a:rPr lang="vi-VN" smtClean="0"/>
-              <a:t>09/04/2022</a:t>
+              <a:pPr/>
+              <a:t>30/07/2024</a:t>
             </a:fld>
             <a:endParaRPr lang="vi-VN"/>
           </a:p>
@@ -2813,6 +2836,7 @@
           <a:p>
             <a:fld id="{8B6AAF8F-DA5E-43F5-BA0E-0C99CF35ACC9}" type="slidenum">
               <a:rPr lang="vi-VN" smtClean="0"/>
+              <a:pPr/>
               <a:t>‹#›</a:t>
             </a:fld>
             <a:endParaRPr lang="vi-VN"/>
@@ -2822,7 +2846,7 @@
     </p:spTree>
     <p:extLst>
       <p:ext uri="{BB962C8B-B14F-4D97-AF65-F5344CB8AC3E}">
-        <p14:creationId xmlns:p14="http://schemas.microsoft.com/office/powerpoint/2010/main" val="2946048601"/>
+        <p14:creationId xmlns:p14="http://schemas.microsoft.com/office/powerpoint/2010/main" xmlns="" val="2946048601"/>
       </p:ext>
     </p:extLst>
   </p:cSld>
@@ -3147,24 +3171,7 @@
                 <a:latin typeface="微軟正黑體" pitchFamily="34" charset="-120"/>
                 <a:ea typeface="微軟正黑體" pitchFamily="34" charset="-120"/>
               </a:rPr>
-              <a:t>這</a:t>
-            </a:r>
-            <a:r>
-              <a:rPr lang="zh-TW" altLang="en-US" sz="7200" b="1" i="1" dirty="0">
-                <a:solidFill>
-                  <a:srgbClr val="660033"/>
-                </a:solidFill>
-                <a:effectLst>
-                  <a:outerShdw blurRad="38100" dist="38100" dir="2700000" algn="tl">
-                    <a:srgbClr val="000000">
-                      <a:alpha val="43137"/>
-                    </a:srgbClr>
-                  </a:outerShdw>
-                </a:effectLst>
-                <a:latin typeface="微軟正黑體" pitchFamily="34" charset="-120"/>
-                <a:ea typeface="微軟正黑體" pitchFamily="34" charset="-120"/>
-              </a:rPr>
-              <a:t>一生最美的祝福</a:t>
+              <a:t>這一生最美的祝福</a:t>
             </a:r>
           </a:p>
         </p:txBody>
@@ -3172,7 +3179,7 @@
     </p:spTree>
     <p:extLst>
       <p:ext uri="{BB962C8B-B14F-4D97-AF65-F5344CB8AC3E}">
-        <p14:creationId xmlns:p14="http://schemas.microsoft.com/office/powerpoint/2010/main" val="2623250550"/>
+        <p14:creationId xmlns:p14="http://schemas.microsoft.com/office/powerpoint/2010/main" xmlns="" val="2623250550"/>
       </p:ext>
     </p:extLst>
   </p:cSld>
@@ -3232,27 +3239,7 @@
                 <a:latin typeface="微軟正黑體" pitchFamily="34" charset="-120"/>
                 <a:ea typeface="微軟正黑體" pitchFamily="34" charset="-120"/>
               </a:rPr>
-              <a:t>在</a:t>
-            </a:r>
-            <a:r>
-              <a:rPr lang="zh-TW" altLang="en-US" sz="6400" b="1" dirty="0">
-                <a:solidFill>
-                  <a:srgbClr val="660033"/>
-                </a:solidFill>
-                <a:latin typeface="微軟正黑體" pitchFamily="34" charset="-120"/>
-                <a:ea typeface="微軟正黑體" pitchFamily="34" charset="-120"/>
-              </a:rPr>
-              <a:t>無數的黑夜</a:t>
-            </a:r>
-            <a:r>
-              <a:rPr lang="zh-TW" altLang="en-US" sz="6400" b="1" dirty="0">
-                <a:solidFill>
-                  <a:srgbClr val="660033"/>
-                </a:solidFill>
-                <a:latin typeface="微軟正黑體" pitchFamily="34" charset="-120"/>
-                <a:ea typeface="微軟正黑體" pitchFamily="34" charset="-120"/>
-              </a:rPr>
-              <a:t>裡</a:t>
+              <a:t>在無數的黑夜裡</a:t>
             </a:r>
             <a:endParaRPr lang="en-US" altLang="zh-TW" sz="6400" b="1" dirty="0">
               <a:solidFill>
@@ -3274,20 +3261,10 @@
                 <a:latin typeface="微軟正黑體" pitchFamily="34" charset="-120"/>
                 <a:ea typeface="微軟正黑體" pitchFamily="34" charset="-120"/>
               </a:rPr>
-              <a:t>我</a:t>
-            </a:r>
-            <a:r>
-              <a:rPr lang="zh-TW" altLang="en-US" sz="6400" b="1" dirty="0">
-                <a:solidFill>
-                  <a:srgbClr val="660033"/>
-                </a:solidFill>
-                <a:latin typeface="微軟正黑體" pitchFamily="34" charset="-120"/>
-                <a:ea typeface="微軟正黑體" pitchFamily="34" charset="-120"/>
-              </a:rPr>
-              <a:t>用星星畫</a:t>
-            </a:r>
-            <a:r>
-              <a:rPr lang="zh-TW" altLang="en-US" sz="6400" b="1" dirty="0">
+              <a:t>我用星星畫</a:t>
+            </a:r>
+            <a:r>
+              <a:rPr lang="zh-TW" altLang="en-US" sz="6400" b="1" dirty="0" smtClean="0">
                 <a:solidFill>
                   <a:srgbClr val="660033"/>
                 </a:solidFill>
@@ -3297,14 +3274,14 @@
               <a:t>出</a:t>
             </a:r>
             <a:r>
-              <a:rPr lang="zh-CN" altLang="en-US" sz="6400" b="1" dirty="0">
+              <a:rPr lang="zh-CN" altLang="en-US" sz="6400" b="1" dirty="0" smtClean="0">
                 <a:solidFill>
                   <a:srgbClr val="660033"/>
                 </a:solidFill>
                 <a:latin typeface="微軟正黑體" pitchFamily="34" charset="-120"/>
                 <a:ea typeface="微軟正黑體" pitchFamily="34" charset="-120"/>
               </a:rPr>
-              <a:t>袮</a:t>
+              <a:t>祢</a:t>
             </a:r>
             <a:endParaRPr lang="en-US" altLang="zh-TW" sz="6400" b="1" dirty="0">
               <a:solidFill>
@@ -3325,7 +3302,7 @@
         <p:spPr>
           <a:xfrm>
             <a:off x="0" y="5157192"/>
-            <a:ext cx="12192000" cy="748988"/>
+            <a:ext cx="12192000" cy="646331"/>
           </a:xfrm>
           <a:prstGeom prst="rect">
             <a:avLst/>
@@ -3340,7 +3317,7 @@
           <a:p>
             <a:pPr algn="ctr"/>
             <a:r>
-              <a:rPr lang="en-US" sz="4267" b="1" dirty="0">
+              <a:rPr lang="en-US" sz="3600" b="1" dirty="0">
                 <a:solidFill>
                   <a:srgbClr val="660033"/>
                 </a:solidFill>
@@ -3350,26 +3327,36 @@
               <a:t>( </a:t>
             </a:r>
             <a:r>
-              <a:rPr lang="zh-CN" altLang="en-US" sz="4267" b="1" dirty="0">
+              <a:rPr lang="zh-CN" altLang="en-US" sz="3600" b="1" dirty="0" smtClean="0">
                 <a:solidFill>
                   <a:srgbClr val="660033"/>
                 </a:solidFill>
                 <a:latin typeface="Microsoft JhengHei" panose="020B0604030504040204" pitchFamily="34" charset="-120"/>
                 <a:ea typeface="Microsoft JhengHei" panose="020B0604030504040204" pitchFamily="34" charset="-120"/>
               </a:rPr>
-              <a:t>正</a:t>
-            </a:r>
-            <a:r>
-              <a:rPr lang="en-US" sz="4267" b="1" dirty="0">
+              <a:t>正歌</a:t>
+            </a:r>
+            <a:r>
+              <a:rPr lang="en-US" sz="3600" b="1" dirty="0" smtClean="0">
                 <a:solidFill>
                   <a:srgbClr val="660033"/>
                 </a:solidFill>
                 <a:latin typeface="Microsoft JhengHei" panose="020B0604030504040204" pitchFamily="34" charset="-120"/>
                 <a:ea typeface="Microsoft JhengHei" panose="020B0604030504040204" pitchFamily="34" charset="-120"/>
               </a:rPr>
-              <a:t> )</a:t>
-            </a:r>
-            <a:endParaRPr lang="vi-VN" sz="4267" b="1" dirty="0">
+              <a:t> </a:t>
+            </a:r>
+            <a:r>
+              <a:rPr lang="en-US" sz="3600" b="1" dirty="0">
+                <a:solidFill>
+                  <a:srgbClr val="660033"/>
+                </a:solidFill>
+                <a:latin typeface="Microsoft JhengHei" panose="020B0604030504040204" pitchFamily="34" charset="-120"/>
+                <a:ea typeface="Microsoft JhengHei" panose="020B0604030504040204" pitchFamily="34" charset="-120"/>
+              </a:rPr>
+              <a:t>)</a:t>
+            </a:r>
+            <a:endParaRPr lang="vi-VN" sz="3600" b="1" dirty="0">
               <a:solidFill>
                 <a:srgbClr val="660033"/>
               </a:solidFill>
@@ -3381,7 +3368,7 @@
     </p:spTree>
     <p:extLst>
       <p:ext uri="{BB962C8B-B14F-4D97-AF65-F5344CB8AC3E}">
-        <p14:creationId xmlns:p14="http://schemas.microsoft.com/office/powerpoint/2010/main" val="4097903000"/>
+        <p14:creationId xmlns:p14="http://schemas.microsoft.com/office/powerpoint/2010/main" xmlns="" val="4097903000"/>
       </p:ext>
     </p:extLst>
   </p:cSld>
@@ -3434,17 +3421,17 @@
               <a:buNone/>
             </a:pPr>
             <a:r>
-              <a:rPr lang="zh-CN" altLang="en-US" sz="6400" b="1" dirty="0">
+              <a:rPr lang="zh-CN" altLang="en-US" sz="6400" b="1" dirty="0" smtClean="0">
                 <a:solidFill>
                   <a:srgbClr val="660033"/>
                 </a:solidFill>
                 <a:latin typeface="微軟正黑體" pitchFamily="34" charset="-120"/>
                 <a:ea typeface="微軟正黑體" pitchFamily="34" charset="-120"/>
               </a:rPr>
-              <a:t>袮</a:t>
-            </a:r>
-            <a:r>
-              <a:rPr lang="zh-TW" altLang="en-US" sz="6400" b="1" dirty="0">
+              <a:t>祢</a:t>
+            </a:r>
+            <a:r>
+              <a:rPr lang="zh-TW" altLang="en-US" sz="6400" b="1" dirty="0" smtClean="0">
                 <a:solidFill>
                   <a:srgbClr val="660033"/>
                 </a:solidFill>
@@ -3461,17 +3448,7 @@
                 <a:latin typeface="微軟正黑體" pitchFamily="34" charset="-120"/>
                 <a:ea typeface="微軟正黑體" pitchFamily="34" charset="-120"/>
               </a:rPr>
-              <a:t>恩典如晨</a:t>
-            </a:r>
-            <a:r>
-              <a:rPr lang="zh-TW" altLang="en-US" sz="6400" b="1" dirty="0">
-                <a:solidFill>
-                  <a:srgbClr val="660033"/>
-                </a:solidFill>
-                <a:latin typeface="微軟正黑體" pitchFamily="34" charset="-120"/>
-                <a:ea typeface="微軟正黑體" pitchFamily="34" charset="-120"/>
-              </a:rPr>
-              <a:t>星</a:t>
+              <a:t>恩典如晨星</a:t>
             </a:r>
             <a:endParaRPr lang="en-US" altLang="zh-TW" sz="6400" b="1" dirty="0">
               <a:solidFill>
@@ -3493,37 +3470,27 @@
                 <a:latin typeface="微軟正黑體" pitchFamily="34" charset="-120"/>
                 <a:ea typeface="微軟正黑體" pitchFamily="34" charset="-120"/>
               </a:rPr>
-              <a:t>讓</a:t>
-            </a:r>
-            <a:r>
-              <a:rPr lang="zh-TW" altLang="en-US" sz="6400" b="1" dirty="0">
+              <a:t>讓我真實的</a:t>
+            </a:r>
+            <a:r>
+              <a:rPr lang="zh-TW" altLang="en-US" sz="6400" b="1" dirty="0" smtClean="0">
                 <a:solidFill>
                   <a:srgbClr val="660033"/>
                 </a:solidFill>
                 <a:latin typeface="微軟正黑體" pitchFamily="34" charset="-120"/>
                 <a:ea typeface="微軟正黑體" pitchFamily="34" charset="-120"/>
               </a:rPr>
-              <a:t>我真實的見</a:t>
-            </a:r>
-            <a:r>
-              <a:rPr lang="zh-TW" altLang="en-US" sz="6400" b="1" dirty="0">
+              <a:t>見到</a:t>
+            </a:r>
+            <a:r>
+              <a:rPr lang="zh-CN" altLang="en-US" sz="6400" b="1" dirty="0" smtClean="0">
                 <a:solidFill>
                   <a:srgbClr val="660033"/>
                 </a:solidFill>
                 <a:latin typeface="微軟正黑體" pitchFamily="34" charset="-120"/>
                 <a:ea typeface="微軟正黑體" pitchFamily="34" charset="-120"/>
               </a:rPr>
-              <a:t>到</a:t>
-            </a:r>
-            <a:r>
-              <a:rPr lang="zh-CN" altLang="en-US" sz="6400" b="1" dirty="0">
-                <a:solidFill>
-                  <a:srgbClr val="660033"/>
-                </a:solidFill>
-                <a:latin typeface="微軟正黑體" pitchFamily="34" charset="-120"/>
-                <a:ea typeface="微軟正黑體" pitchFamily="34" charset="-120"/>
-              </a:rPr>
-              <a:t>袮</a:t>
+              <a:t>祢</a:t>
             </a:r>
             <a:endParaRPr lang="en-US" altLang="zh-TW" sz="6400" b="1" dirty="0">
               <a:solidFill>
@@ -3544,7 +3511,7 @@
         <p:spPr>
           <a:xfrm>
             <a:off x="0" y="5157192"/>
-            <a:ext cx="12192000" cy="748988"/>
+            <a:ext cx="12192000" cy="646331"/>
           </a:xfrm>
           <a:prstGeom prst="rect">
             <a:avLst/>
@@ -3559,7 +3526,7 @@
           <a:p>
             <a:pPr algn="ctr"/>
             <a:r>
-              <a:rPr lang="en-US" sz="4267" b="1" dirty="0">
+              <a:rPr lang="en-US" sz="3600" b="1" dirty="0" smtClean="0">
                 <a:solidFill>
                   <a:srgbClr val="660033"/>
                 </a:solidFill>
@@ -3569,17 +3536,17 @@
               <a:t>( </a:t>
             </a:r>
             <a:r>
-              <a:rPr lang="zh-CN" altLang="en-US" sz="4267" b="1" dirty="0">
+              <a:rPr lang="zh-CN" altLang="en-US" sz="3600" b="1" dirty="0" smtClean="0">
                 <a:solidFill>
                   <a:srgbClr val="660033"/>
                 </a:solidFill>
                 <a:latin typeface="Microsoft JhengHei" panose="020B0604030504040204" pitchFamily="34" charset="-120"/>
                 <a:ea typeface="Microsoft JhengHei" panose="020B0604030504040204" pitchFamily="34" charset="-120"/>
               </a:rPr>
-              <a:t>正</a:t>
-            </a:r>
-            <a:r>
-              <a:rPr lang="en-US" sz="4267" b="1" dirty="0">
+              <a:t>正歌</a:t>
+            </a:r>
+            <a:r>
+              <a:rPr lang="en-US" sz="3600" b="1" dirty="0" smtClean="0">
                 <a:solidFill>
                   <a:srgbClr val="660033"/>
                 </a:solidFill>
@@ -3588,10 +3555,11 @@
               </a:rPr>
               <a:t> )</a:t>
             </a:r>
-            <a:endParaRPr lang="vi-VN" sz="4267" b="1" dirty="0">
+            <a:endParaRPr lang="vi-VN" sz="3600" b="1" dirty="0">
               <a:solidFill>
                 <a:srgbClr val="660033"/>
               </a:solidFill>
+              <a:latin typeface="Microsoft JhengHei" panose="020B0604030504040204" pitchFamily="34" charset="-120"/>
               <a:ea typeface="Microsoft JhengHei" panose="020B0604030504040204" pitchFamily="34" charset="-120"/>
             </a:endParaRPr>
           </a:p>
@@ -3600,7 +3568,7 @@
     </p:spTree>
     <p:extLst>
       <p:ext uri="{BB962C8B-B14F-4D97-AF65-F5344CB8AC3E}">
-        <p14:creationId xmlns:p14="http://schemas.microsoft.com/office/powerpoint/2010/main" val="2571806804"/>
+        <p14:creationId xmlns:p14="http://schemas.microsoft.com/office/powerpoint/2010/main" xmlns="" val="2571806804"/>
       </p:ext>
     </p:extLst>
   </p:cSld>
@@ -3660,47 +3628,27 @@
                 <a:latin typeface="微軟正黑體" pitchFamily="34" charset="-120"/>
                 <a:ea typeface="微軟正黑體" pitchFamily="34" charset="-120"/>
               </a:rPr>
-              <a:t>在我的歌聲</a:t>
-            </a:r>
-            <a:r>
-              <a:rPr lang="zh-TW" altLang="en-US" sz="6400" b="1" dirty="0">
+              <a:t>在我的歌聲裡   我用音符</a:t>
+            </a:r>
+            <a:r>
+              <a:rPr lang="zh-TW" altLang="en-US" sz="6400" b="1" dirty="0" smtClean="0">
                 <a:solidFill>
                   <a:srgbClr val="660033"/>
                 </a:solidFill>
                 <a:latin typeface="微軟正黑體" pitchFamily="34" charset="-120"/>
                 <a:ea typeface="微軟正黑體" pitchFamily="34" charset="-120"/>
               </a:rPr>
-              <a:t>裡   我</a:t>
-            </a:r>
-            <a:r>
-              <a:rPr lang="zh-TW" altLang="en-US" sz="6400" b="1" dirty="0">
+              <a:t>讚美</a:t>
+            </a:r>
+            <a:r>
+              <a:rPr lang="zh-CN" altLang="en-US" sz="6400" b="1" dirty="0" smtClean="0">
                 <a:solidFill>
                   <a:srgbClr val="660033"/>
                 </a:solidFill>
                 <a:latin typeface="微軟正黑體" pitchFamily="34" charset="-120"/>
                 <a:ea typeface="微軟正黑體" pitchFamily="34" charset="-120"/>
               </a:rPr>
-              <a:t>用音符讚</a:t>
-            </a:r>
-            <a:r>
-              <a:rPr lang="zh-TW" altLang="en-US" sz="6400" b="1" dirty="0">
-                <a:solidFill>
-                  <a:srgbClr val="660033"/>
-                </a:solidFill>
-                <a:latin typeface="微軟正黑體" pitchFamily="34" charset="-120"/>
-                <a:ea typeface="微軟正黑體" pitchFamily="34" charset="-120"/>
-              </a:rPr>
-              <a:t>美</a:t>
-            </a:r>
-            <a:r>
-              <a:rPr lang="zh-CN" altLang="en-US" sz="6400" b="1" dirty="0">
-                <a:solidFill>
-                  <a:srgbClr val="660033"/>
-                </a:solidFill>
-                <a:latin typeface="微軟正黑體" pitchFamily="34" charset="-120"/>
-                <a:ea typeface="微軟正黑體" pitchFamily="34" charset="-120"/>
-              </a:rPr>
-              <a:t>袮</a:t>
+              <a:t>祢</a:t>
             </a:r>
             <a:endParaRPr lang="en-US" altLang="zh-TW" sz="6400" b="1" dirty="0">
               <a:solidFill>
@@ -3715,17 +3663,17 @@
               <a:buNone/>
             </a:pPr>
             <a:r>
-              <a:rPr lang="zh-CN" altLang="en-US" sz="6400" b="1" dirty="0">
+              <a:rPr lang="zh-CN" altLang="en-US" sz="6400" b="1" dirty="0" smtClean="0">
                 <a:solidFill>
                   <a:srgbClr val="660033"/>
                 </a:solidFill>
                 <a:latin typeface="微軟正黑體" pitchFamily="34" charset="-120"/>
                 <a:ea typeface="微軟正黑體" pitchFamily="34" charset="-120"/>
               </a:rPr>
-              <a:t>袮</a:t>
-            </a:r>
-            <a:r>
-              <a:rPr lang="zh-TW" altLang="en-US" sz="6400" b="1" dirty="0">
+              <a:t>祢</a:t>
+            </a:r>
+            <a:r>
+              <a:rPr lang="zh-TW" altLang="en-US" sz="6400" b="1" dirty="0" smtClean="0">
                 <a:solidFill>
                   <a:srgbClr val="660033"/>
                 </a:solidFill>
@@ -3763,7 +3711,7 @@
         <p:spPr>
           <a:xfrm>
             <a:off x="0" y="5157192"/>
-            <a:ext cx="12192000" cy="748988"/>
+            <a:ext cx="12192000" cy="646331"/>
           </a:xfrm>
           <a:prstGeom prst="rect">
             <a:avLst/>
@@ -3778,7 +3726,7 @@
           <a:p>
             <a:pPr algn="ctr"/>
             <a:r>
-              <a:rPr lang="en-US" sz="4267" b="1" dirty="0">
+              <a:rPr lang="en-US" sz="3600" b="1" dirty="0" smtClean="0">
                 <a:solidFill>
                   <a:srgbClr val="660033"/>
                 </a:solidFill>
@@ -3788,17 +3736,17 @@
               <a:t>( </a:t>
             </a:r>
             <a:r>
-              <a:rPr lang="zh-CN" altLang="en-US" sz="4267" b="1" dirty="0">
+              <a:rPr lang="zh-CN" altLang="en-US" sz="3600" b="1" dirty="0" smtClean="0">
                 <a:solidFill>
                   <a:srgbClr val="660033"/>
                 </a:solidFill>
                 <a:latin typeface="Microsoft JhengHei" panose="020B0604030504040204" pitchFamily="34" charset="-120"/>
                 <a:ea typeface="Microsoft JhengHei" panose="020B0604030504040204" pitchFamily="34" charset="-120"/>
               </a:rPr>
-              <a:t>正</a:t>
-            </a:r>
-            <a:r>
-              <a:rPr lang="en-US" sz="4267" b="1" dirty="0">
+              <a:t>正歌</a:t>
+            </a:r>
+            <a:r>
+              <a:rPr lang="en-US" sz="3600" b="1" dirty="0" smtClean="0">
                 <a:solidFill>
                   <a:srgbClr val="660033"/>
                 </a:solidFill>
@@ -3807,10 +3755,11 @@
               </a:rPr>
               <a:t> )</a:t>
             </a:r>
-            <a:endParaRPr lang="vi-VN" sz="4267" b="1" dirty="0">
+            <a:endParaRPr lang="vi-VN" sz="3600" b="1" dirty="0">
               <a:solidFill>
                 <a:srgbClr val="660033"/>
               </a:solidFill>
+              <a:latin typeface="Microsoft JhengHei" panose="020B0604030504040204" pitchFamily="34" charset="-120"/>
               <a:ea typeface="Microsoft JhengHei" panose="020B0604030504040204" pitchFamily="34" charset="-120"/>
             </a:endParaRPr>
           </a:p>
@@ -3819,7 +3768,7 @@
     </p:spTree>
     <p:extLst>
       <p:ext uri="{BB962C8B-B14F-4D97-AF65-F5344CB8AC3E}">
-        <p14:creationId xmlns:p14="http://schemas.microsoft.com/office/powerpoint/2010/main" val="4067690155"/>
+        <p14:creationId xmlns:p14="http://schemas.microsoft.com/office/powerpoint/2010/main" xmlns="" val="4067690155"/>
       </p:ext>
     </p:extLst>
   </p:cSld>
@@ -3879,17 +3828,7 @@
                 <a:latin typeface="微軟正黑體" pitchFamily="34" charset="-120"/>
                 <a:ea typeface="微軟正黑體" pitchFamily="34" charset="-120"/>
               </a:rPr>
-              <a:t>這一生最美的祝</a:t>
-            </a:r>
-            <a:r>
-              <a:rPr lang="zh-TW" altLang="en-US" sz="6400" b="1" dirty="0">
-                <a:solidFill>
-                  <a:srgbClr val="660033"/>
-                </a:solidFill>
-                <a:latin typeface="微軟正黑體" pitchFamily="34" charset="-120"/>
-                <a:ea typeface="微軟正黑體" pitchFamily="34" charset="-120"/>
-              </a:rPr>
-              <a:t>福</a:t>
+              <a:t>這一生最美的祝福</a:t>
             </a:r>
             <a:endParaRPr lang="en-US" altLang="zh-TW" sz="6400" b="1" dirty="0">
               <a:solidFill>
@@ -3911,17 +3850,7 @@
                 <a:latin typeface="微軟正黑體" pitchFamily="34" charset="-120"/>
                 <a:ea typeface="微軟正黑體" pitchFamily="34" charset="-120"/>
               </a:rPr>
-              <a:t>就</a:t>
-            </a:r>
-            <a:r>
-              <a:rPr lang="zh-TW" altLang="en-US" sz="6400" b="1" dirty="0">
-                <a:solidFill>
-                  <a:srgbClr val="660033"/>
-                </a:solidFill>
-                <a:latin typeface="微軟正黑體" pitchFamily="34" charset="-120"/>
-                <a:ea typeface="微軟正黑體" pitchFamily="34" charset="-120"/>
-              </a:rPr>
-              <a:t>是能認識主耶穌</a:t>
+              <a:t>就是能認識主耶穌</a:t>
             </a:r>
             <a:endParaRPr lang="en-US" altLang="zh-TW" sz="6400" b="1" dirty="0">
               <a:solidFill>
@@ -3942,7 +3871,7 @@
         <p:spPr>
           <a:xfrm>
             <a:off x="0" y="5157192"/>
-            <a:ext cx="12192000" cy="748988"/>
+            <a:ext cx="12192000" cy="646331"/>
           </a:xfrm>
           <a:prstGeom prst="rect">
             <a:avLst/>
@@ -3957,7 +3886,7 @@
           <a:p>
             <a:pPr algn="ctr"/>
             <a:r>
-              <a:rPr lang="en-US" sz="4267" b="1" dirty="0">
+              <a:rPr lang="en-US" sz="3600" b="1" dirty="0">
                 <a:solidFill>
                   <a:srgbClr val="660033"/>
                 </a:solidFill>
@@ -3967,29 +3896,40 @@
               <a:t>( </a:t>
             </a:r>
             <a:r>
-              <a:rPr lang="zh-CN" altLang="en-US" sz="4267" b="1" dirty="0">
+              <a:rPr lang="zh-CN" altLang="en-US" sz="3600" b="1" dirty="0" smtClean="0">
                 <a:solidFill>
                   <a:srgbClr val="660033"/>
                 </a:solidFill>
                 <a:latin typeface="Microsoft JhengHei" panose="020B0604030504040204" pitchFamily="34" charset="-120"/>
                 <a:ea typeface="Microsoft JhengHei" panose="020B0604030504040204" pitchFamily="34" charset="-120"/>
               </a:rPr>
-              <a:t>副</a:t>
-            </a:r>
-            <a:r>
-              <a:rPr lang="en-US" sz="4267" b="1" dirty="0">
+              <a:t>副歌</a:t>
+            </a:r>
+            <a:r>
+              <a:rPr lang="en-US" sz="3600" b="1" dirty="0" smtClean="0">
                 <a:solidFill>
                   <a:srgbClr val="660033"/>
                 </a:solidFill>
                 <a:latin typeface="Microsoft JhengHei" panose="020B0604030504040204" pitchFamily="34" charset="-120"/>
                 <a:ea typeface="Microsoft JhengHei" panose="020B0604030504040204" pitchFamily="34" charset="-120"/>
               </a:rPr>
-              <a:t> )</a:t>
-            </a:r>
-            <a:endParaRPr lang="vi-VN" sz="4267" b="1" dirty="0">
+              <a:t> </a:t>
+            </a:r>
+            <a:r>
+              <a:rPr lang="en-US" sz="3600" b="1" dirty="0">
+                <a:solidFill>
+                  <a:srgbClr val="660033"/>
+                </a:solidFill>
+                <a:latin typeface="Microsoft JhengHei" panose="020B0604030504040204" pitchFamily="34" charset="-120"/>
+                <a:ea typeface="Microsoft JhengHei" panose="020B0604030504040204" pitchFamily="34" charset="-120"/>
+              </a:rPr>
+              <a:t>)</a:t>
+            </a:r>
+            <a:endParaRPr lang="vi-VN" sz="3600" b="1" dirty="0">
               <a:solidFill>
                 <a:srgbClr val="660033"/>
               </a:solidFill>
+              <a:latin typeface="Microsoft JhengHei" panose="020B0604030504040204" pitchFamily="34" charset="-120"/>
               <a:ea typeface="Microsoft JhengHei" panose="020B0604030504040204" pitchFamily="34" charset="-120"/>
             </a:endParaRPr>
           </a:p>
@@ -3998,7 +3938,7 @@
     </p:spTree>
     <p:extLst>
       <p:ext uri="{BB962C8B-B14F-4D97-AF65-F5344CB8AC3E}">
-        <p14:creationId xmlns:p14="http://schemas.microsoft.com/office/powerpoint/2010/main" val="3567770385"/>
+        <p14:creationId xmlns:p14="http://schemas.microsoft.com/office/powerpoint/2010/main" xmlns="" val="3567770385"/>
       </p:ext>
     </p:extLst>
   </p:cSld>
@@ -4058,17 +3998,7 @@
                 <a:latin typeface="微軟正黑體" pitchFamily="34" charset="-120"/>
                 <a:ea typeface="微軟正黑體" pitchFamily="34" charset="-120"/>
               </a:rPr>
-              <a:t>這一生最美的祝</a:t>
-            </a:r>
-            <a:r>
-              <a:rPr lang="zh-TW" altLang="en-US" sz="6400" b="1" dirty="0">
-                <a:solidFill>
-                  <a:srgbClr val="660033"/>
-                </a:solidFill>
-                <a:latin typeface="微軟正黑體" pitchFamily="34" charset="-120"/>
-                <a:ea typeface="微軟正黑體" pitchFamily="34" charset="-120"/>
-              </a:rPr>
-              <a:t>福</a:t>
+              <a:t>這一生最美的祝福</a:t>
             </a:r>
             <a:endParaRPr lang="en-US" altLang="zh-TW" sz="6400" b="1" dirty="0">
               <a:solidFill>
@@ -4090,17 +4020,7 @@
                 <a:latin typeface="微軟正黑體" pitchFamily="34" charset="-120"/>
                 <a:ea typeface="微軟正黑體" pitchFamily="34" charset="-120"/>
               </a:rPr>
-              <a:t>就</a:t>
-            </a:r>
-            <a:r>
-              <a:rPr lang="zh-TW" altLang="en-US" sz="6400" b="1" dirty="0">
-                <a:solidFill>
-                  <a:srgbClr val="660033"/>
-                </a:solidFill>
-                <a:latin typeface="微軟正黑體" pitchFamily="34" charset="-120"/>
-                <a:ea typeface="微軟正黑體" pitchFamily="34" charset="-120"/>
-              </a:rPr>
-              <a:t>是能信靠主耶穌</a:t>
+              <a:t>就是能信靠主耶穌</a:t>
             </a:r>
             <a:endParaRPr lang="en-US" altLang="zh-TW" sz="6400" b="1" dirty="0">
               <a:solidFill>
@@ -4121,7 +4041,7 @@
         <p:spPr>
           <a:xfrm>
             <a:off x="0" y="5157192"/>
-            <a:ext cx="12192000" cy="748988"/>
+            <a:ext cx="12192000" cy="646331"/>
           </a:xfrm>
           <a:prstGeom prst="rect">
             <a:avLst/>
@@ -4136,7 +4056,7 @@
           <a:p>
             <a:pPr algn="ctr"/>
             <a:r>
-              <a:rPr lang="en-US" sz="4267" b="1" dirty="0">
+              <a:rPr lang="en-US" sz="3600" b="1" dirty="0" smtClean="0">
                 <a:solidFill>
                   <a:srgbClr val="660033"/>
                 </a:solidFill>
@@ -4146,17 +4066,17 @@
               <a:t>( </a:t>
             </a:r>
             <a:r>
-              <a:rPr lang="zh-CN" altLang="en-US" sz="4267" b="1" dirty="0">
+              <a:rPr lang="zh-CN" altLang="en-US" sz="3600" b="1" dirty="0" smtClean="0">
                 <a:solidFill>
                   <a:srgbClr val="660033"/>
                 </a:solidFill>
                 <a:latin typeface="Microsoft JhengHei" panose="020B0604030504040204" pitchFamily="34" charset="-120"/>
                 <a:ea typeface="Microsoft JhengHei" panose="020B0604030504040204" pitchFamily="34" charset="-120"/>
               </a:rPr>
-              <a:t>副</a:t>
-            </a:r>
-            <a:r>
-              <a:rPr lang="en-US" sz="4267" b="1" dirty="0">
+              <a:t>副歌</a:t>
+            </a:r>
+            <a:r>
+              <a:rPr lang="en-US" sz="3600" b="1" dirty="0" smtClean="0">
                 <a:solidFill>
                   <a:srgbClr val="660033"/>
                 </a:solidFill>
@@ -4165,10 +4085,11 @@
               </a:rPr>
               <a:t> )</a:t>
             </a:r>
-            <a:endParaRPr lang="vi-VN" sz="4267" b="1" dirty="0">
+            <a:endParaRPr lang="vi-VN" sz="3600" b="1" dirty="0">
               <a:solidFill>
                 <a:srgbClr val="660033"/>
               </a:solidFill>
+              <a:latin typeface="Microsoft JhengHei" panose="020B0604030504040204" pitchFamily="34" charset="-120"/>
               <a:ea typeface="Microsoft JhengHei" panose="020B0604030504040204" pitchFamily="34" charset="-120"/>
             </a:endParaRPr>
           </a:p>
@@ -4177,7 +4098,7 @@
     </p:spTree>
     <p:extLst>
       <p:ext uri="{BB962C8B-B14F-4D97-AF65-F5344CB8AC3E}">
-        <p14:creationId xmlns:p14="http://schemas.microsoft.com/office/powerpoint/2010/main" val="3283928990"/>
+        <p14:creationId xmlns:p14="http://schemas.microsoft.com/office/powerpoint/2010/main" xmlns="" val="3283928990"/>
       </p:ext>
     </p:extLst>
   </p:cSld>
@@ -4237,37 +4158,7 @@
                 <a:latin typeface="微軟正黑體" pitchFamily="34" charset="-120"/>
                 <a:ea typeface="微軟正黑體" pitchFamily="34" charset="-120"/>
               </a:rPr>
-              <a:t>走在高山深</a:t>
-            </a:r>
-            <a:r>
-              <a:rPr lang="zh-TW" altLang="en-US" sz="6400" b="1" dirty="0">
-                <a:solidFill>
-                  <a:srgbClr val="660033"/>
-                </a:solidFill>
-                <a:latin typeface="微軟正黑體" pitchFamily="34" charset="-120"/>
-                <a:ea typeface="微軟正黑體" pitchFamily="34" charset="-120"/>
-              </a:rPr>
-              <a:t>谷   祂</a:t>
-            </a:r>
-            <a:r>
-              <a:rPr lang="zh-TW" altLang="en-US" sz="6400" b="1" dirty="0">
-                <a:solidFill>
-                  <a:srgbClr val="660033"/>
-                </a:solidFill>
-                <a:latin typeface="微軟正黑體" pitchFamily="34" charset="-120"/>
-                <a:ea typeface="微軟正黑體" pitchFamily="34" charset="-120"/>
-              </a:rPr>
-              <a:t>會伴我同</a:t>
-            </a:r>
-            <a:r>
-              <a:rPr lang="zh-TW" altLang="en-US" sz="6400" b="1" dirty="0">
-                <a:solidFill>
-                  <a:srgbClr val="660033"/>
-                </a:solidFill>
-                <a:latin typeface="微軟正黑體" pitchFamily="34" charset="-120"/>
-                <a:ea typeface="微軟正黑體" pitchFamily="34" charset="-120"/>
-              </a:rPr>
-              <a:t>行</a:t>
+              <a:t>走在高山深谷   祂會伴我同行</a:t>
             </a:r>
             <a:endParaRPr lang="en-US" altLang="zh-TW" sz="6400" b="1" dirty="0">
               <a:solidFill>
@@ -4289,37 +4180,7 @@
                 <a:latin typeface="微軟正黑體" pitchFamily="34" charset="-120"/>
                 <a:ea typeface="微軟正黑體" pitchFamily="34" charset="-120"/>
               </a:rPr>
-              <a:t>我</a:t>
-            </a:r>
-            <a:r>
-              <a:rPr lang="zh-TW" altLang="en-US" sz="6400" b="1" dirty="0">
-                <a:solidFill>
-                  <a:srgbClr val="660033"/>
-                </a:solidFill>
-                <a:latin typeface="微軟正黑體" pitchFamily="34" charset="-120"/>
-                <a:ea typeface="微軟正黑體" pitchFamily="34" charset="-120"/>
-              </a:rPr>
-              <a:t>知</a:t>
-            </a:r>
-            <a:r>
-              <a:rPr lang="zh-TW" altLang="en-US" sz="6400" b="1" dirty="0">
-                <a:solidFill>
-                  <a:srgbClr val="660033"/>
-                </a:solidFill>
-                <a:latin typeface="微軟正黑體" pitchFamily="34" charset="-120"/>
-                <a:ea typeface="微軟正黑體" pitchFamily="34" charset="-120"/>
-              </a:rPr>
-              <a:t>道   這</a:t>
-            </a:r>
-            <a:r>
-              <a:rPr lang="zh-TW" altLang="en-US" sz="6400" b="1" dirty="0">
-                <a:solidFill>
-                  <a:srgbClr val="660033"/>
-                </a:solidFill>
-                <a:latin typeface="微軟正黑體" pitchFamily="34" charset="-120"/>
-                <a:ea typeface="微軟正黑體" pitchFamily="34" charset="-120"/>
-              </a:rPr>
-              <a:t>是最美的祝福</a:t>
+              <a:t>我知道   這是最美的祝福</a:t>
             </a:r>
             <a:endParaRPr lang="en-US" altLang="zh-TW" sz="6400" b="1" dirty="0">
               <a:solidFill>
@@ -4340,7 +4201,7 @@
         <p:spPr>
           <a:xfrm>
             <a:off x="0" y="5157192"/>
-            <a:ext cx="12192000" cy="748988"/>
+            <a:ext cx="12192000" cy="646331"/>
           </a:xfrm>
           <a:prstGeom prst="rect">
             <a:avLst/>
@@ -4355,7 +4216,7 @@
           <a:p>
             <a:pPr algn="ctr"/>
             <a:r>
-              <a:rPr lang="en-US" sz="4267" b="1" dirty="0">
+              <a:rPr lang="en-US" sz="3600" b="1" dirty="0" smtClean="0">
                 <a:solidFill>
                   <a:srgbClr val="660033"/>
                 </a:solidFill>
@@ -4365,17 +4226,17 @@
               <a:t>( </a:t>
             </a:r>
             <a:r>
-              <a:rPr lang="zh-CN" altLang="en-US" sz="4267" b="1" dirty="0">
+              <a:rPr lang="zh-CN" altLang="en-US" sz="3600" b="1" dirty="0" smtClean="0">
                 <a:solidFill>
                   <a:srgbClr val="660033"/>
                 </a:solidFill>
                 <a:latin typeface="Microsoft JhengHei" panose="020B0604030504040204" pitchFamily="34" charset="-120"/>
                 <a:ea typeface="Microsoft JhengHei" panose="020B0604030504040204" pitchFamily="34" charset="-120"/>
               </a:rPr>
-              <a:t>副</a:t>
-            </a:r>
-            <a:r>
-              <a:rPr lang="en-US" sz="4267" b="1" dirty="0">
+              <a:t>副歌</a:t>
+            </a:r>
+            <a:r>
+              <a:rPr lang="en-US" sz="3600" b="1" dirty="0" smtClean="0">
                 <a:solidFill>
                   <a:srgbClr val="660033"/>
                 </a:solidFill>
@@ -4384,10 +4245,11 @@
               </a:rPr>
               <a:t> )</a:t>
             </a:r>
-            <a:endParaRPr lang="vi-VN" sz="4267" b="1" dirty="0">
+            <a:endParaRPr lang="vi-VN" sz="3600" b="1" dirty="0">
               <a:solidFill>
                 <a:srgbClr val="660033"/>
               </a:solidFill>
+              <a:latin typeface="Microsoft JhengHei" panose="020B0604030504040204" pitchFamily="34" charset="-120"/>
               <a:ea typeface="Microsoft JhengHei" panose="020B0604030504040204" pitchFamily="34" charset="-120"/>
             </a:endParaRPr>
           </a:p>
@@ -4396,7 +4258,7 @@
     </p:spTree>
     <p:extLst>
       <p:ext uri="{BB962C8B-B14F-4D97-AF65-F5344CB8AC3E}">
-        <p14:creationId xmlns:p14="http://schemas.microsoft.com/office/powerpoint/2010/main" val="2573548894"/>
+        <p14:creationId xmlns:p14="http://schemas.microsoft.com/office/powerpoint/2010/main" xmlns="" val="2573548894"/>
       </p:ext>
     </p:extLst>
   </p:cSld>
@@ -4688,7 +4550,7 @@
   <a:extraClrSchemeLst/>
   <a:extLst>
     <a:ext uri="{05A4C25C-085E-4340-85A3-A5531E510DB2}">
-      <thm15:themeFamily xmlns:thm15="http://schemas.microsoft.com/office/thememl/2012/main" name="Theme1" id="{1A8DE197-990E-4893-BF04-3823FBB50F9A}" vid="{430B7048-5A04-4BDB-939A-C7E865DB887B}"/>
+      <thm15:themeFamily xmlns:thm15="http://schemas.microsoft.com/office/thememl/2012/main" xmlns="" name="Theme1" id="{1A8DE197-990E-4893-BF04-3823FBB50F9A}" vid="{430B7048-5A04-4BDB-939A-C7E865DB887B}"/>
     </a:ext>
   </a:extLst>
 </a:theme>
